--- a/미니프로젝트1.pptx
+++ b/미니프로젝트1.pptx
@@ -7549,7 +7549,7 @@
         <p:spPr>
           <a:xfrm>
             <a:off x="616106" y="1206548"/>
-            <a:ext cx="10080528" cy="3590727"/>
+            <a:ext cx="10080528" cy="3708708"/>
           </a:xfrm>
           <a:prstGeom prst="rect">
             <a:avLst/>
@@ -7566,6 +7566,9 @@
               <a:rPr lang="ko-KR" altLang="en-US" sz="2000" b="1" dirty="0"/>
               <a:t>주요 요구 사항</a:t>
             </a:r>
+            <a:endParaRPr lang="en-US" altLang="ko-KR" sz="2000" b="1" dirty="0"/>
+          </a:p>
+          <a:p>
             <a:endParaRPr lang="en-US" altLang="ko-KR" sz="2000" b="1" dirty="0"/>
           </a:p>
           <a:p>
@@ -7637,29 +7640,19 @@
                   </a:schemeClr>
                 </a:solidFill>
               </a:rPr>
-              <a:t>,</a:t>
+              <a:t>,  </a:t>
             </a:r>
           </a:p>
           <a:p>
             <a:r>
-              <a:rPr lang="ko-KR" altLang="en-US" sz="1300" dirty="0">
+              <a:rPr lang="en-US" altLang="ko-KR" sz="1300" dirty="0">
                 <a:solidFill>
                   <a:schemeClr val="accent3">
                     <a:lumMod val="50000"/>
                   </a:schemeClr>
                 </a:solidFill>
               </a:rPr>
-              <a:t>   사용자로부터 브랜드 및 조회 기간을 입력 받아 </a:t>
-            </a:r>
-            <a:r>
-              <a:rPr lang="ko-KR" altLang="en-US" sz="1300" dirty="0" err="1">
-                <a:solidFill>
-                  <a:schemeClr val="accent3">
-                    <a:lumMod val="50000"/>
-                  </a:schemeClr>
-                </a:solidFill>
-              </a:rPr>
-              <a:t>다나와</a:t>
+              <a:t>   RPA</a:t>
             </a:r>
             <a:r>
               <a:rPr lang="ko-KR" altLang="en-US" sz="1300" dirty="0">
@@ -7669,7 +7662,47 @@
                   </a:schemeClr>
                 </a:solidFill>
               </a:rPr>
-              <a:t> 자동차 판매 데이터를 조회한다</a:t>
+              <a:t>가 </a:t>
+            </a:r>
+            <a:r>
+              <a:rPr lang="en-US" altLang="ko-KR" sz="1300" dirty="0">
+                <a:solidFill>
+                  <a:schemeClr val="accent3">
+                    <a:lumMod val="50000"/>
+                  </a:schemeClr>
+                </a:solidFill>
+              </a:rPr>
+              <a:t>ChatGPT</a:t>
+            </a:r>
+            <a:r>
+              <a:rPr lang="ko-KR" altLang="en-US" sz="1300" dirty="0">
+                <a:solidFill>
+                  <a:schemeClr val="accent3">
+                    <a:lumMod val="50000"/>
+                  </a:schemeClr>
+                </a:solidFill>
+              </a:rPr>
+              <a:t>에 이미지 분석</a:t>
+            </a:r>
+            <a:r>
+              <a:rPr lang="en-US" altLang="ko-KR" sz="1300" dirty="0">
+                <a:solidFill>
+                  <a:schemeClr val="accent3">
+                    <a:lumMod val="50000"/>
+                  </a:schemeClr>
+                </a:solidFill>
+              </a:rPr>
+              <a:t>, </a:t>
+            </a:r>
+            <a:r>
+              <a:rPr lang="ko-KR" altLang="en-US" sz="1300" dirty="0">
+                <a:solidFill>
+                  <a:schemeClr val="accent3">
+                    <a:lumMod val="50000"/>
+                  </a:schemeClr>
+                </a:solidFill>
+              </a:rPr>
+              <a:t>생성을 요청한다</a:t>
             </a:r>
             <a:r>
               <a:rPr lang="en-US" altLang="ko-KR" sz="1300" dirty="0">
@@ -7683,11 +7716,16 @@
             </a:r>
           </a:p>
           <a:p>
-            <a:pPr>
-              <a:lnSpc>
-                <a:spcPts val="1950"/>
-              </a:lnSpc>
-            </a:pPr>
+            <a:r>
+              <a:rPr lang="ko-KR" altLang="en-US" sz="1300" dirty="0">
+                <a:solidFill>
+                  <a:schemeClr val="accent3">
+                    <a:lumMod val="50000"/>
+                  </a:schemeClr>
+                </a:solidFill>
+              </a:rPr>
+              <a:t>   </a:t>
+            </a:r>
             <a:endParaRPr lang="en-US" altLang="ko-KR" sz="800" dirty="0">
               <a:solidFill>
                 <a:schemeClr val="accent3">
@@ -7715,7 +7753,27 @@
                   </a:schemeClr>
                 </a:solidFill>
               </a:rPr>
-              <a:t>브랜드 또는 조회 기간 </a:t>
+              <a:t>요청 결과가 개발자 의도와 다를 경우 </a:t>
+            </a:r>
+            <a:r>
+              <a:rPr lang="en-US" altLang="ko-KR" sz="1300" dirty="0">
+                <a:solidFill>
+                  <a:schemeClr val="accent3">
+                    <a:lumMod val="50000"/>
+                  </a:schemeClr>
+                </a:solidFill>
+              </a:rPr>
+              <a:t>1</a:t>
+            </a:r>
+            <a:r>
+              <a:rPr lang="ko-KR" altLang="en-US" sz="1300" dirty="0">
+                <a:solidFill>
+                  <a:schemeClr val="accent3">
+                    <a:lumMod val="50000"/>
+                  </a:schemeClr>
+                </a:solidFill>
+              </a:rPr>
+              <a:t>회 </a:t>
             </a:r>
             <a:r>
               <a:rPr lang="ko-KR" altLang="en-US" sz="1300" dirty="0" err="1">
@@ -7725,17 +7783,7 @@
                   </a:schemeClr>
                 </a:solidFill>
               </a:rPr>
-              <a:t>미입력</a:t>
-            </a:r>
-            <a:r>
-              <a:rPr lang="ko-KR" altLang="en-US" sz="1300" dirty="0">
-                <a:solidFill>
-                  <a:schemeClr val="accent3">
-                    <a:lumMod val="50000"/>
-                  </a:schemeClr>
-                </a:solidFill>
-              </a:rPr>
-              <a:t> 시 기본값을 적용하고</a:t>
+              <a:t>재요청하며</a:t>
             </a:r>
             <a:r>
               <a:rPr lang="en-US" altLang="ko-KR" sz="1300" dirty="0">
@@ -7757,7 +7805,27 @@
                   </a:schemeClr>
                 </a:solidFill>
               </a:rPr>
-              <a:t>   입력 브랜드는 기본 브랜드와 중복 제거 후 검색 대상에 포함한다</a:t>
+              <a:t>   </a:t>
+            </a:r>
+            <a:r>
+              <a:rPr lang="ko-KR" altLang="en-US" sz="1300" dirty="0" err="1">
+                <a:solidFill>
+                  <a:schemeClr val="accent3">
+                    <a:lumMod val="50000"/>
+                  </a:schemeClr>
+                </a:solidFill>
+              </a:rPr>
+              <a:t>재요청</a:t>
+            </a:r>
+            <a:r>
+              <a:rPr lang="ko-KR" altLang="en-US" sz="1300" dirty="0">
+                <a:solidFill>
+                  <a:schemeClr val="accent3">
+                    <a:lumMod val="50000"/>
+                  </a:schemeClr>
+                </a:solidFill>
+              </a:rPr>
+              <a:t> 결과도 다를 경우 이미지는 작업 대상에서 제외 처리한다</a:t>
             </a:r>
             <a:r>
               <a:rPr lang="en-US" altLang="ko-KR" sz="1300" dirty="0">
@@ -7771,11 +7839,6 @@
             </a:r>
           </a:p>
           <a:p>
-            <a:pPr>
-              <a:lnSpc>
-                <a:spcPts val="1950"/>
-              </a:lnSpc>
-            </a:pPr>
             <a:endParaRPr lang="en-US" altLang="ko-KR" sz="1300" dirty="0">
               <a:solidFill>
                 <a:schemeClr val="accent3">
@@ -7803,8 +7866,15 @@
                   </a:schemeClr>
                 </a:solidFill>
               </a:rPr>
-              <a:t>조회 결과는 그래프 이미지와 엑셀 데이터로 추출하여 보고서 템플릿에 입력한 후</a:t>
+              <a:t>모든 이미지 처리 및 분류가 완료되면</a:t>
             </a:r>
+            <a:endParaRPr lang="en-US" altLang="ko-KR" sz="1300" dirty="0">
+              <a:solidFill>
+                <a:schemeClr val="accent3">
+                  <a:lumMod val="50000"/>
+                </a:schemeClr>
+              </a:solidFill>
+            </a:endParaRPr>
           </a:p>
           <a:p>
             <a:r>
@@ -7815,7 +7885,7 @@
                   </a:schemeClr>
                 </a:solidFill>
               </a:rPr>
-              <a:t>   서식 설정을 거쳐 결과 파일로 저장한다</a:t>
+              <a:t>   최종 결과를 메일로 자동 전송한다</a:t>
             </a:r>
             <a:r>
               <a:rPr lang="en-US" altLang="ko-KR" sz="1300" dirty="0">
@@ -7842,6 +7912,9 @@
               <a:rPr lang="ko-KR" altLang="en-US" sz="2000" b="1" dirty="0"/>
               <a:t>참고사항</a:t>
             </a:r>
+            <a:endParaRPr lang="en-US" altLang="ko-KR" sz="2000" b="1" dirty="0"/>
+          </a:p>
+          <a:p>
             <a:endParaRPr lang="en-US" altLang="ko-KR" sz="1500" dirty="0">
               <a:solidFill>
                 <a:schemeClr val="accent3">
@@ -7943,16 +8016,6 @@
             </a:r>
           </a:p>
           <a:p>
-            <a:r>
-              <a:rPr lang="en-US" altLang="ko-KR" sz="1300" dirty="0">
-                <a:solidFill>
-                  <a:schemeClr val="accent3">
-                    <a:lumMod val="50000"/>
-                  </a:schemeClr>
-                </a:solidFill>
-              </a:rPr>
-              <a:t>2. </a:t>
-            </a:r>
             <a:endParaRPr lang="en-US" altLang="ko-KR" sz="2000" dirty="0">
               <a:solidFill>
                 <a:schemeClr val="accent3">
@@ -7960,18 +8023,6 @@
                 </a:schemeClr>
               </a:solidFill>
             </a:endParaRPr>
-          </a:p>
-          <a:p>
-            <a:r>
-              <a:rPr lang="en-US" altLang="ko-KR" sz="2000" dirty="0">
-                <a:solidFill>
-                  <a:schemeClr val="accent3">
-                    <a:lumMod val="50000"/>
-                  </a:schemeClr>
-                </a:solidFill>
-              </a:rPr>
-              <a:t>     </a:t>
-            </a:r>
           </a:p>
           <a:p>
             <a:pPr marL="914400" lvl="1" indent="-457200">
@@ -9077,13 +9128,13 @@
           <p:nvPr>
             <p:extLst>
               <p:ext uri="{D42A27DB-BD31-4B8C-83A1-F6EECF244321}">
-                <p14:modId xmlns:p14="http://schemas.microsoft.com/office/powerpoint/2010/main" val="945565650"/>
+                <p14:modId xmlns:p14="http://schemas.microsoft.com/office/powerpoint/2010/main" val="4258568762"/>
               </p:ext>
             </p:extLst>
           </p:nvPr>
         </p:nvGraphicFramePr>
         <p:xfrm>
-          <a:off x="1013436" y="1048113"/>
+          <a:off x="1013435" y="1194455"/>
           <a:ext cx="10271805" cy="4668270"/>
         </p:xfrm>
         <a:graphic>
@@ -9210,15 +9261,15 @@
                     <a:p>
                       <a:pPr algn="ctr" latinLnBrk="1"/>
                       <a:r>
-                        <a:rPr lang="en-US" altLang="ko-KR" sz="1000" b="0">
+                        <a:rPr lang="en-US" altLang="ko-KR" sz="1000" b="0" dirty="0">
                           <a:solidFill>
                             <a:schemeClr val="tx1"/>
                           </a:solidFill>
                         </a:rPr>
-                        <a:t>2026.01.06</a:t>
+                        <a:t>2026.01.</a:t>
                       </a:r>
                       <a:r>
-                        <a:rPr lang="ko-KR" altLang="en-US" sz="1000" b="0">
+                        <a:rPr lang="ko-KR" altLang="en-US" sz="1000" b="0" dirty="0">
                           <a:solidFill>
                             <a:schemeClr val="tx1"/>
                           </a:solidFill>
@@ -10707,7 +10758,7 @@
         </p:blipFill>
         <p:spPr>
           <a:xfrm>
-            <a:off x="1829338" y="2154455"/>
+            <a:off x="1829337" y="2359445"/>
             <a:ext cx="8640000" cy="3271359"/>
           </a:xfrm>
           <a:prstGeom prst="rect">
@@ -11803,10 +11854,10 @@
       </p:grpSp>
       <p:graphicFrame>
         <p:nvGraphicFramePr>
-          <p:cNvPr id="7" name="표 6">
+          <p:cNvPr id="5" name="표 4">
             <a:extLst>
               <a:ext uri="{FF2B5EF4-FFF2-40B4-BE49-F238E27FC236}">
-                <a16:creationId xmlns:a16="http://schemas.microsoft.com/office/drawing/2014/main" id="{46E7977A-DE22-0ADB-464B-EFA76D08490D}"/>
+                <a16:creationId xmlns:a16="http://schemas.microsoft.com/office/drawing/2014/main" id="{669B8214-8B0A-5A10-04A9-9DDDCCBA5390}"/>
               </a:ext>
             </a:extLst>
           </p:cNvPr>
@@ -11816,14 +11867,14 @@
           <p:nvPr>
             <p:extLst>
               <p:ext uri="{D42A27DB-BD31-4B8C-83A1-F6EECF244321}">
-                <p14:modId xmlns:p14="http://schemas.microsoft.com/office/powerpoint/2010/main" val="799118220"/>
+                <p14:modId xmlns:p14="http://schemas.microsoft.com/office/powerpoint/2010/main" val="3917989567"/>
               </p:ext>
             </p:extLst>
           </p:nvPr>
         </p:nvGraphicFramePr>
         <p:xfrm>
-          <a:off x="1026052" y="1058704"/>
-          <a:ext cx="10244789" cy="4255642"/>
+          <a:off x="1013435" y="1194455"/>
+          <a:ext cx="10271806" cy="4255336"/>
         </p:xfrm>
         <a:graphic>
           <a:graphicData uri="http://schemas.openxmlformats.org/drawingml/2006/table">
@@ -11832,28 +11883,28 @@
                 <a:tableStyleId>{5C22544A-7EE6-4342-B048-85BDC9FD1C3A}</a:tableStyleId>
               </a:tblPr>
               <a:tblGrid>
-                <a:gridCol w="366981">
+                <a:gridCol w="367949">
                   <a:extLst>
                     <a:ext uri="{9D8B030D-6E8A-4147-A177-3AD203B41FA5}">
                       <a16:colId xmlns:a16="http://schemas.microsoft.com/office/drawing/2014/main" val="2949329046"/>
                     </a:ext>
                   </a:extLst>
                 </a:gridCol>
-                <a:gridCol w="2013555">
+                <a:gridCol w="2018865">
                   <a:extLst>
                     <a:ext uri="{9D8B030D-6E8A-4147-A177-3AD203B41FA5}">
                       <a16:colId xmlns:a16="http://schemas.microsoft.com/office/drawing/2014/main" val="4175160694"/>
                     </a:ext>
                   </a:extLst>
                 </a:gridCol>
-                <a:gridCol w="6620203">
+                <a:gridCol w="6637661">
                   <a:extLst>
                     <a:ext uri="{9D8B030D-6E8A-4147-A177-3AD203B41FA5}">
                       <a16:colId xmlns:a16="http://schemas.microsoft.com/office/drawing/2014/main" val="1017136227"/>
                     </a:ext>
                   </a:extLst>
                 </a:gridCol>
-                <a:gridCol w="1244050">
+                <a:gridCol w="1247331">
                   <a:extLst>
                     <a:ext uri="{9D8B030D-6E8A-4147-A177-3AD203B41FA5}">
                       <a16:colId xmlns:a16="http://schemas.microsoft.com/office/drawing/2014/main" val="845590638"/>
@@ -11861,7 +11912,7 @@
                   </a:extLst>
                 </a:gridCol>
               </a:tblGrid>
-              <a:tr h="445063">
+              <a:tr h="444875">
                 <a:tc>
                   <a:txBody>
                     <a:bodyPr/>
@@ -12249,7 +12300,7 @@
                   </a:ext>
                 </a:extLst>
               </a:tr>
-              <a:tr h="279429">
+              <a:tr h="520916">
                 <a:tc>
                   <a:txBody>
                     <a:bodyPr/>
@@ -12644,7 +12695,7 @@
                   </a:ext>
                 </a:extLst>
               </a:tr>
-              <a:tr h="122607">
+              <a:tr h="280987">
                 <a:tc>
                   <a:txBody>
                     <a:bodyPr/>
@@ -12977,7 +13028,7 @@
                   </a:ext>
                 </a:extLst>
               </a:tr>
-              <a:tr h="236072">
+              <a:tr h="280987">
                 <a:tc>
                   <a:txBody>
                     <a:bodyPr/>
@@ -13273,7 +13324,7 @@
                   </a:ext>
                 </a:extLst>
               </a:tr>
-              <a:tr h="0">
+              <a:tr h="280987">
                 <a:tc>
                   <a:txBody>
                     <a:bodyPr/>
@@ -13561,7 +13612,7 @@
                   </a:ext>
                 </a:extLst>
               </a:tr>
-              <a:tr h="277494">
+              <a:tr h="520916">
                 <a:tc>
                   <a:txBody>
                     <a:bodyPr/>
@@ -13894,7 +13945,7 @@
                   </a:ext>
                 </a:extLst>
               </a:tr>
-              <a:tr h="279429">
+              <a:tr h="280987">
                 <a:tc>
                   <a:txBody>
                     <a:bodyPr/>
@@ -14267,7 +14318,7 @@
                   </a:ext>
                 </a:extLst>
               </a:tr>
-              <a:tr h="279429">
+              <a:tr h="280987">
                 <a:tc>
                   <a:txBody>
                     <a:bodyPr/>
@@ -14580,7 +14631,7 @@
                   </a:ext>
                 </a:extLst>
               </a:tr>
-              <a:tr h="279429">
+              <a:tr h="280987">
                 <a:tc>
                   <a:txBody>
                     <a:bodyPr/>
@@ -14973,7 +15024,7 @@
                   </a:ext>
                 </a:extLst>
               </a:tr>
-              <a:tr h="279429">
+              <a:tr h="280987">
                 <a:tc>
                   <a:txBody>
                     <a:bodyPr/>
@@ -15286,7 +15337,7 @@
                   </a:ext>
                 </a:extLst>
               </a:tr>
-              <a:tr h="279429">
+              <a:tr h="520916">
                 <a:tc>
                   <a:txBody>
                     <a:bodyPr/>
@@ -15635,7 +15686,7 @@
                   </a:ext>
                 </a:extLst>
               </a:tr>
-              <a:tr h="279429">
+              <a:tr h="279311">
                 <a:tc gridSpan="4">
                   <a:txBody>
                     <a:bodyPr/>
